--- a/Demo/Javascript.pptx
+++ b/Demo/Javascript.pptx
@@ -274,7 +274,7 @@
           <a:p>
             <a:fld id="{1CA5457B-CDAE-4DEB-AEC8-C82DE2312E37}" type="datetimeFigureOut">
               <a:rPr lang="en-US" smtClean="0"/>
-              <a:t>5/10/2026</a:t>
+              <a:t>5/17/2026</a:t>
             </a:fld>
             <a:endParaRPr lang="en-US" dirty="0"/>
           </a:p>
@@ -451,7 +451,7 @@
           <a:p>
             <a:fld id="{090B78EA-28CE-41D8-9043-90E391E5F567}" type="datetimeFigureOut">
               <a:rPr lang="en-US" noProof="0" smtClean="0"/>
-              <a:t>5/10/2026</a:t>
+              <a:t>5/17/2026</a:t>
             </a:fld>
             <a:endParaRPr lang="en-US" noProof="0" dirty="0"/>
           </a:p>
@@ -26152,6 +26152,10 @@
               <a:rPr lang="en-US"/>
               <a:t>:</a:t>
             </a:r>
+            <a:r>
+              <a:rPr lang="en-US" dirty="0"/>
+              <a:t/>
+            </a:r>
             <a:br>
               <a:rPr lang="en-US" dirty="0"/>
             </a:br>
@@ -39401,6 +39405,10 @@
             </a:r>
           </a:p>
           <a:p>
+            <a:r>
+              <a:rPr lang="vi-VN" dirty="0"/>
+              <a:t/>
+            </a:r>
             <a:br>
               <a:rPr lang="vi-VN" dirty="0"/>
             </a:br>
@@ -40680,13 +40688,13 @@
   <p:clrMapOvr>
     <a:masterClrMapping/>
   </p:clrMapOvr>
-  <mc:AlternateContent xmlns:mc="http://schemas.openxmlformats.org/markup-compatibility/2006">
-    <mc:Choice xmlns:p14="http://schemas.microsoft.com/office/powerpoint/2010/main" Requires="p14">
+  <mc:AlternateContent xmlns:mc="http://schemas.openxmlformats.org/markup-compatibility/2006" xmlns:p14="http://schemas.microsoft.com/office/powerpoint/2010/main">
+    <mc:Choice Requires="p14">
       <p:transition spd="med" p14:dur="700">
         <p:fade/>
       </p:transition>
     </mc:Choice>
-    <mc:Fallback>
+    <mc:Fallback xmlns="">
       <p:transition spd="med">
         <p:fade/>
       </p:transition>
@@ -41322,13 +41330,13 @@
   <p:clrMapOvr>
     <a:masterClrMapping/>
   </p:clrMapOvr>
-  <mc:AlternateContent xmlns:mc="http://schemas.openxmlformats.org/markup-compatibility/2006">
-    <mc:Choice xmlns:p14="http://schemas.microsoft.com/office/powerpoint/2010/main" Requires="p14">
+  <mc:AlternateContent xmlns:mc="http://schemas.openxmlformats.org/markup-compatibility/2006" xmlns:p14="http://schemas.microsoft.com/office/powerpoint/2010/main">
+    <mc:Choice Requires="p14">
       <p:transition spd="med" p14:dur="700">
         <p:fade/>
       </p:transition>
     </mc:Choice>
-    <mc:Fallback>
+    <mc:Fallback xmlns="">
       <p:transition spd="med">
         <p:fade/>
       </p:transition>
@@ -41975,13 +41983,13 @@
   <p:clrMapOvr>
     <a:masterClrMapping/>
   </p:clrMapOvr>
-  <mc:AlternateContent xmlns:mc="http://schemas.openxmlformats.org/markup-compatibility/2006">
-    <mc:Choice xmlns:p14="http://schemas.microsoft.com/office/powerpoint/2010/main" Requires="p14">
+  <mc:AlternateContent xmlns:mc="http://schemas.openxmlformats.org/markup-compatibility/2006" xmlns:p14="http://schemas.microsoft.com/office/powerpoint/2010/main">
+    <mc:Choice Requires="p14">
       <p:transition spd="med" p14:dur="700">
         <p:fade/>
       </p:transition>
     </mc:Choice>
-    <mc:Fallback>
+    <mc:Fallback xmlns="">
       <p:transition spd="med">
         <p:fade/>
       </p:transition>
@@ -43131,13 +43139,13 @@
   <p:clrMapOvr>
     <a:masterClrMapping/>
   </p:clrMapOvr>
-  <mc:AlternateContent xmlns:mc="http://schemas.openxmlformats.org/markup-compatibility/2006">
-    <mc:Choice xmlns:p14="http://schemas.microsoft.com/office/powerpoint/2010/main" Requires="p14">
+  <mc:AlternateContent xmlns:mc="http://schemas.openxmlformats.org/markup-compatibility/2006" xmlns:p14="http://schemas.microsoft.com/office/powerpoint/2010/main">
+    <mc:Choice Requires="p14">
       <p:transition spd="med" p14:dur="700">
         <p:fade/>
       </p:transition>
     </mc:Choice>
-    <mc:Fallback>
+    <mc:Fallback xmlns="">
       <p:transition spd="med">
         <p:fade/>
       </p:transition>
@@ -43817,6 +43825,10 @@
             <a:br>
               <a:rPr lang="vi-VN" dirty="0"/>
             </a:br>
+            <a:r>
+              <a:rPr lang="vi-VN" dirty="0"/>
+              <a:t/>
+            </a:r>
             <a:br>
               <a:rPr lang="vi-VN" dirty="0"/>
             </a:br>
@@ -44123,13 +44135,13 @@
   <p:clrMapOvr>
     <a:masterClrMapping/>
   </p:clrMapOvr>
-  <mc:AlternateContent xmlns:mc="http://schemas.openxmlformats.org/markup-compatibility/2006">
-    <mc:Choice xmlns:p14="http://schemas.microsoft.com/office/powerpoint/2010/main" Requires="p14">
+  <mc:AlternateContent xmlns:mc="http://schemas.openxmlformats.org/markup-compatibility/2006" xmlns:p14="http://schemas.microsoft.com/office/powerpoint/2010/main">
+    <mc:Choice Requires="p14">
       <p:transition spd="med" p14:dur="700">
         <p:fade/>
       </p:transition>
     </mc:Choice>
-    <mc:Fallback>
+    <mc:Fallback xmlns="">
       <p:transition spd="med">
         <p:fade/>
       </p:transition>
@@ -45106,9 +45118,17 @@
               <a:rPr lang="en-US" dirty="0"/>
               <a:t>}</a:t>
             </a:r>
+            <a:r>
+              <a:rPr lang="vi-VN" dirty="0"/>
+              <a:t/>
+            </a:r>
             <a:br>
               <a:rPr lang="vi-VN" dirty="0"/>
             </a:br>
+            <a:r>
+              <a:rPr lang="vi-VN" dirty="0"/>
+              <a:t/>
+            </a:r>
             <a:br>
               <a:rPr lang="vi-VN" dirty="0"/>
             </a:br>
@@ -45126,13 +45146,13 @@
   <p:clrMapOvr>
     <a:masterClrMapping/>
   </p:clrMapOvr>
-  <mc:AlternateContent xmlns:mc="http://schemas.openxmlformats.org/markup-compatibility/2006">
-    <mc:Choice xmlns:p14="http://schemas.microsoft.com/office/powerpoint/2010/main" Requires="p14">
+  <mc:AlternateContent xmlns:mc="http://schemas.openxmlformats.org/markup-compatibility/2006" xmlns:p14="http://schemas.microsoft.com/office/powerpoint/2010/main">
+    <mc:Choice Requires="p14">
       <p:transition spd="med" p14:dur="700">
         <p:fade/>
       </p:transition>
     </mc:Choice>
-    <mc:Fallback>
+    <mc:Fallback xmlns="">
       <p:transition spd="med">
         <p:fade/>
       </p:transition>
@@ -45695,6 +45715,10 @@
             <a:br>
               <a:rPr lang="vi-VN" dirty="0"/>
             </a:br>
+            <a:r>
+              <a:rPr lang="vi-VN" dirty="0"/>
+              <a:t/>
+            </a:r>
             <a:br>
               <a:rPr lang="vi-VN" dirty="0"/>
             </a:br>
@@ -45712,13 +45736,13 @@
   <p:clrMapOvr>
     <a:masterClrMapping/>
   </p:clrMapOvr>
-  <mc:AlternateContent xmlns:mc="http://schemas.openxmlformats.org/markup-compatibility/2006">
-    <mc:Choice xmlns:p14="http://schemas.microsoft.com/office/powerpoint/2010/main" Requires="p14">
+  <mc:AlternateContent xmlns:mc="http://schemas.openxmlformats.org/markup-compatibility/2006" xmlns:p14="http://schemas.microsoft.com/office/powerpoint/2010/main">
+    <mc:Choice Requires="p14">
       <p:transition spd="med" p14:dur="700">
         <p:fade/>
       </p:transition>
     </mc:Choice>
-    <mc:Fallback>
+    <mc:Fallback xmlns="">
       <p:transition spd="med">
         <p:fade/>
       </p:transition>
@@ -46675,13 +46699,13 @@
   <p:clrMapOvr>
     <a:masterClrMapping/>
   </p:clrMapOvr>
-  <mc:AlternateContent xmlns:mc="http://schemas.openxmlformats.org/markup-compatibility/2006">
-    <mc:Choice xmlns:p14="http://schemas.microsoft.com/office/powerpoint/2010/main" Requires="p14">
+  <mc:AlternateContent xmlns:mc="http://schemas.openxmlformats.org/markup-compatibility/2006" xmlns:p14="http://schemas.microsoft.com/office/powerpoint/2010/main">
+    <mc:Choice Requires="p14">
       <p:transition spd="med" p14:dur="700">
         <p:fade/>
       </p:transition>
     </mc:Choice>
-    <mc:Fallback>
+    <mc:Fallback xmlns="">
       <p:transition spd="med">
         <p:fade/>
       </p:transition>
@@ -47363,6 +47387,10 @@
             <a:pPr marL="0" indent="0">
               <a:buNone/>
             </a:pPr>
+            <a:r>
+              <a:rPr lang="en-US" dirty="0"/>
+              <a:t/>
+            </a:r>
             <a:br>
               <a:rPr lang="en-US" dirty="0"/>
             </a:br>
@@ -47883,13 +47911,13 @@
   <p:clrMapOvr>
     <a:masterClrMapping/>
   </p:clrMapOvr>
-  <mc:AlternateContent xmlns:mc="http://schemas.openxmlformats.org/markup-compatibility/2006">
-    <mc:Choice xmlns:p14="http://schemas.microsoft.com/office/powerpoint/2010/main" Requires="p14">
+  <mc:AlternateContent xmlns:mc="http://schemas.openxmlformats.org/markup-compatibility/2006" xmlns:p14="http://schemas.microsoft.com/office/powerpoint/2010/main">
+    <mc:Choice Requires="p14">
       <p:transition spd="med" p14:dur="700">
         <p:fade/>
       </p:transition>
     </mc:Choice>
-    <mc:Fallback>
+    <mc:Fallback xmlns="">
       <p:transition spd="med">
         <p:fade/>
       </p:transition>
@@ -48571,13 +48599,13 @@
   <p:clrMapOvr>
     <a:masterClrMapping/>
   </p:clrMapOvr>
-  <mc:AlternateContent xmlns:mc="http://schemas.openxmlformats.org/markup-compatibility/2006">
-    <mc:Choice xmlns:p14="http://schemas.microsoft.com/office/powerpoint/2010/main" Requires="p14">
+  <mc:AlternateContent xmlns:mc="http://schemas.openxmlformats.org/markup-compatibility/2006" xmlns:p14="http://schemas.microsoft.com/office/powerpoint/2010/main">
+    <mc:Choice Requires="p14">
       <p:transition spd="med" p14:dur="700">
         <p:fade/>
       </p:transition>
     </mc:Choice>
-    <mc:Fallback>
+    <mc:Fallback xmlns="">
       <p:transition spd="med">
         <p:fade/>
       </p:transition>
@@ -49531,13 +49559,13 @@
   <p:clrMapOvr>
     <a:masterClrMapping/>
   </p:clrMapOvr>
-  <mc:AlternateContent xmlns:mc="http://schemas.openxmlformats.org/markup-compatibility/2006">
-    <mc:Choice xmlns:p14="http://schemas.microsoft.com/office/powerpoint/2010/main" Requires="p14">
+  <mc:AlternateContent xmlns:mc="http://schemas.openxmlformats.org/markup-compatibility/2006" xmlns:p14="http://schemas.microsoft.com/office/powerpoint/2010/main">
+    <mc:Choice Requires="p14">
       <p:transition spd="med" p14:dur="700">
         <p:fade/>
       </p:transition>
     </mc:Choice>
-    <mc:Fallback>
+    <mc:Fallback xmlns="">
       <p:transition spd="med">
         <p:fade/>
       </p:transition>
@@ -50108,13 +50136,13 @@
   <p:clrMapOvr>
     <a:masterClrMapping/>
   </p:clrMapOvr>
-  <mc:AlternateContent xmlns:mc="http://schemas.openxmlformats.org/markup-compatibility/2006">
-    <mc:Choice xmlns:p14="http://schemas.microsoft.com/office/powerpoint/2010/main" Requires="p14">
+  <mc:AlternateContent xmlns:mc="http://schemas.openxmlformats.org/markup-compatibility/2006" xmlns:p14="http://schemas.microsoft.com/office/powerpoint/2010/main">
+    <mc:Choice Requires="p14">
       <p:transition spd="med" p14:dur="700">
         <p:fade/>
       </p:transition>
     </mc:Choice>
-    <mc:Fallback>
+    <mc:Fallback xmlns="">
       <p:transition spd="med">
         <p:fade/>
       </p:transition>
@@ -50681,13 +50709,13 @@
   <p:clrMapOvr>
     <a:masterClrMapping/>
   </p:clrMapOvr>
-  <mc:AlternateContent xmlns:mc="http://schemas.openxmlformats.org/markup-compatibility/2006">
-    <mc:Choice xmlns:p14="http://schemas.microsoft.com/office/powerpoint/2010/main" Requires="p14">
+  <mc:AlternateContent xmlns:mc="http://schemas.openxmlformats.org/markup-compatibility/2006" xmlns:p14="http://schemas.microsoft.com/office/powerpoint/2010/main">
+    <mc:Choice Requires="p14">
       <p:transition spd="med" p14:dur="700">
         <p:fade/>
       </p:transition>
     </mc:Choice>
-    <mc:Fallback>
+    <mc:Fallback xmlns="">
       <p:transition spd="med">
         <p:fade/>
       </p:transition>
@@ -51378,13 +51406,13 @@
   <p:clrMapOvr>
     <a:masterClrMapping/>
   </p:clrMapOvr>
-  <mc:AlternateContent xmlns:mc="http://schemas.openxmlformats.org/markup-compatibility/2006">
-    <mc:Choice xmlns:p14="http://schemas.microsoft.com/office/powerpoint/2010/main" Requires="p14">
+  <mc:AlternateContent xmlns:mc="http://schemas.openxmlformats.org/markup-compatibility/2006" xmlns:p14="http://schemas.microsoft.com/office/powerpoint/2010/main">
+    <mc:Choice Requires="p14">
       <p:transition spd="med" p14:dur="700">
         <p:fade/>
       </p:transition>
     </mc:Choice>
-    <mc:Fallback>
+    <mc:Fallback xmlns="">
       <p:transition spd="med">
         <p:fade/>
       </p:transition>
@@ -52257,7 +52285,7 @@
           <a:blip>
             <a:extLst>
               <a:ext uri="{96DAC541-7B7A-43D3-8B79-37D633B846F1}">
-                <asvg:svgBlip xmlns:asvg="http://schemas.microsoft.com/office/drawing/2016/SVG/main" r:embed="rId4"/>
+                <asvg:svgBlip xmlns:asvg="http://schemas.microsoft.com/office/drawing/2016/SVG/main" xmlns="" r:embed="rId4"/>
               </a:ext>
             </a:extLst>
           </a:blip>
@@ -55022,20 +55050,20 @@
 </file>
 
 <file path=customXml/item1.xml><?xml version="1.0" encoding="utf-8"?>
-<p:properties xmlns:p="http://schemas.microsoft.com/office/2006/metadata/properties" xmlns:xsi="http://www.w3.org/2001/XMLSchema-instance" xmlns:pc="http://schemas.microsoft.com/office/infopath/2007/PartnerControls">
-  <documentManagement>
-    <MediaServiceKeyPoints xmlns="71af3243-3dd4-4a8d-8c0d-dd76da1f02a5" xsi:nil="true"/>
-  </documentManagement>
-</p:properties>
-</file>
-
-<file path=customXml/item2.xml><?xml version="1.0" encoding="utf-8"?>
 <?mso-contentType ?>
 <FormTemplates xmlns="http://schemas.microsoft.com/sharepoint/v3/contenttype/forms">
   <Display>DocumentLibraryForm</Display>
   <Edit>DocumentLibraryForm</Edit>
   <New>DocumentLibraryForm</New>
 </FormTemplates>
+</file>
+
+<file path=customXml/item2.xml><?xml version="1.0" encoding="utf-8"?>
+<p:properties xmlns:p="http://schemas.microsoft.com/office/2006/metadata/properties" xmlns:xsi="http://www.w3.org/2001/XMLSchema-instance" xmlns:pc="http://schemas.microsoft.com/office/infopath/2007/PartnerControls">
+  <documentManagement>
+    <MediaServiceKeyPoints xmlns="71af3243-3dd4-4a8d-8c0d-dd76da1f02a5" xsi:nil="true"/>
+  </documentManagement>
+</p:properties>
 </file>
 
 <file path=customXml/item3.xml><?xml version="1.0" encoding="utf-8"?>
@@ -55250,19 +55278,19 @@
 </file>
 
 <file path=customXml/itemProps1.xml><?xml version="1.0" encoding="utf-8"?>
+<ds:datastoreItem xmlns:ds="http://schemas.openxmlformats.org/officeDocument/2006/customXml" ds:itemID="{5B26E0C9-B2AA-42E6-97B6-E1B7D9EAF129}">
+  <ds:schemaRefs>
+    <ds:schemaRef ds:uri="http://schemas.microsoft.com/sharepoint/v3/contenttype/forms"/>
+  </ds:schemaRefs>
+</ds:datastoreItem>
+</file>
+
+<file path=customXml/itemProps2.xml><?xml version="1.0" encoding="utf-8"?>
 <ds:datastoreItem xmlns:ds="http://schemas.openxmlformats.org/officeDocument/2006/customXml" ds:itemID="{F5757914-1161-4661-9696-421FD6935CDD}">
   <ds:schemaRefs>
     <ds:schemaRef ds:uri="http://schemas.microsoft.com/office/2006/metadata/properties"/>
     <ds:schemaRef ds:uri="http://schemas.microsoft.com/office/infopath/2007/PartnerControls"/>
     <ds:schemaRef ds:uri="71af3243-3dd4-4a8d-8c0d-dd76da1f02a5"/>
-  </ds:schemaRefs>
-</ds:datastoreItem>
-</file>
-
-<file path=customXml/itemProps2.xml><?xml version="1.0" encoding="utf-8"?>
-<ds:datastoreItem xmlns:ds="http://schemas.openxmlformats.org/officeDocument/2006/customXml" ds:itemID="{5B26E0C9-B2AA-42E6-97B6-E1B7D9EAF129}">
-  <ds:schemaRefs>
-    <ds:schemaRef ds:uri="http://schemas.microsoft.com/sharepoint/v3/contenttype/forms"/>
   </ds:schemaRefs>
 </ds:datastoreItem>
 </file>
